--- a/assets/powerpoints/module-relations/E2-je-retiens-des-mots.pptx
+++ b/assets/powerpoints/module-relations/E2-je-retiens-des-mots.pptx
@@ -4290,7 +4290,7 @@
             <a:r>
               <a:rPr sz="1300" b="1" i="0" spc="156">
                 <a:solidFill>
-                  <a:srgbClr val="166534"/>
+                  <a:srgbClr val="A5335F"/>
                 </a:solidFill>
                 <a:latin typeface="Verdana"/>
               </a:rPr>
@@ -4630,7 +4630,7 @@
             <a:r>
               <a:rPr sz="1300" b="1" i="0" spc="156">
                 <a:solidFill>
-                  <a:srgbClr val="166534"/>
+                  <a:srgbClr val="A5335F"/>
                 </a:solidFill>
                 <a:latin typeface="Verdana"/>
               </a:rPr>
@@ -4656,7 +4656,7 @@
             </a:avLst>
           </a:prstGeom>
           <a:solidFill>
-            <a:srgbClr val="E3F1E7"/>
+            <a:srgbClr val="FCE9F0"/>
           </a:solidFill>
           <a:ln w="12700">
             <a:solidFill>
@@ -5523,7 +5523,7 @@
             <a:r>
               <a:rPr sz="1300" b="1" i="0" spc="156">
                 <a:solidFill>
-                  <a:srgbClr val="166534"/>
+                  <a:srgbClr val="A5335F"/>
                 </a:solidFill>
                 <a:latin typeface="Verdana"/>
               </a:rPr>
@@ -5634,7 +5634,7 @@
             </a:avLst>
           </a:prstGeom>
           <a:solidFill>
-            <a:srgbClr val="E3F1E7"/>
+            <a:srgbClr val="FCE9F0"/>
           </a:solidFill>
           <a:ln>
             <a:noFill/>
@@ -5691,7 +5691,7 @@
             <a:r>
               <a:rPr sz="1500" b="1" i="0">
                 <a:solidFill>
-                  <a:srgbClr val="166534"/>
+                  <a:srgbClr val="A5335F"/>
                 </a:solidFill>
                 <a:latin typeface="Verdana"/>
               </a:rPr>
@@ -5802,7 +5802,7 @@
             </a:avLst>
           </a:prstGeom>
           <a:solidFill>
-            <a:srgbClr val="E3F1E7"/>
+            <a:srgbClr val="FCE9F0"/>
           </a:solidFill>
           <a:ln>
             <a:noFill/>
@@ -5859,7 +5859,7 @@
             <a:r>
               <a:rPr sz="1500" b="1" i="0">
                 <a:solidFill>
-                  <a:srgbClr val="166534"/>
+                  <a:srgbClr val="A5335F"/>
                 </a:solidFill>
                 <a:latin typeface="Verdana"/>
               </a:rPr>
@@ -5970,7 +5970,7 @@
             </a:avLst>
           </a:prstGeom>
           <a:solidFill>
-            <a:srgbClr val="E3F1E7"/>
+            <a:srgbClr val="FCE9F0"/>
           </a:solidFill>
           <a:ln>
             <a:noFill/>
@@ -6027,7 +6027,7 @@
             <a:r>
               <a:rPr sz="1500" b="1" i="0">
                 <a:solidFill>
-                  <a:srgbClr val="166534"/>
+                  <a:srgbClr val="A5335F"/>
                 </a:solidFill>
                 <a:latin typeface="Verdana"/>
               </a:rPr>
@@ -6138,7 +6138,7 @@
             </a:avLst>
           </a:prstGeom>
           <a:solidFill>
-            <a:srgbClr val="E3F1E7"/>
+            <a:srgbClr val="FCE9F0"/>
           </a:solidFill>
           <a:ln>
             <a:noFill/>
@@ -6195,7 +6195,7 @@
             <a:r>
               <a:rPr sz="1500" b="1" i="0">
                 <a:solidFill>
-                  <a:srgbClr val="166534"/>
+                  <a:srgbClr val="A5335F"/>
                 </a:solidFill>
                 <a:latin typeface="Verdana"/>
               </a:rPr>
@@ -6411,7 +6411,7 @@
             <a:r>
               <a:rPr sz="1300" b="1" i="0" spc="156">
                 <a:solidFill>
-                  <a:srgbClr val="166534"/>
+                  <a:srgbClr val="A5335F"/>
                 </a:solidFill>
                 <a:latin typeface="Verdana"/>
               </a:rPr>
@@ -7231,7 +7231,7 @@
             <a:r>
               <a:rPr sz="1300" b="1" i="0" spc="156">
                 <a:solidFill>
-                  <a:srgbClr val="166534"/>
+                  <a:srgbClr val="A5335F"/>
                 </a:solidFill>
                 <a:latin typeface="Verdana"/>
               </a:rPr>
@@ -8051,7 +8051,7 @@
             <a:r>
               <a:rPr sz="1300" b="1" i="0" spc="156">
                 <a:solidFill>
-                  <a:srgbClr val="166534"/>
+                  <a:srgbClr val="A5335F"/>
                 </a:solidFill>
                 <a:latin typeface="Verdana"/>
               </a:rPr>
@@ -8871,7 +8871,7 @@
             <a:r>
               <a:rPr sz="1300" b="1" i="0" spc="156">
                 <a:solidFill>
-                  <a:srgbClr val="166534"/>
+                  <a:srgbClr val="A5335F"/>
                 </a:solidFill>
                 <a:latin typeface="Verdana"/>
               </a:rPr>
@@ -9691,7 +9691,7 @@
             <a:r>
               <a:rPr sz="1300" b="1" i="0" spc="156">
                 <a:solidFill>
-                  <a:srgbClr val="166534"/>
+                  <a:srgbClr val="A5335F"/>
                 </a:solidFill>
                 <a:latin typeface="Verdana"/>
               </a:rPr>
@@ -9932,7 +9932,7 @@
             <a:r>
               <a:rPr sz="1800" b="1" i="0">
                 <a:solidFill>
-                  <a:srgbClr val="166534"/>
+                  <a:srgbClr val="A5335F"/>
                 </a:solidFill>
                 <a:latin typeface="Verdana"/>
               </a:rPr>
@@ -10052,7 +10052,7 @@
             <a:r>
               <a:rPr sz="1800" b="1" i="0">
                 <a:solidFill>
-                  <a:srgbClr val="166534"/>
+                  <a:srgbClr val="A5335F"/>
                 </a:solidFill>
                 <a:latin typeface="Verdana"/>
               </a:rPr>
@@ -10172,7 +10172,7 @@
             <a:r>
               <a:rPr sz="1800" b="1" i="0">
                 <a:solidFill>
-                  <a:srgbClr val="166534"/>
+                  <a:srgbClr val="A5335F"/>
                 </a:solidFill>
                 <a:latin typeface="Verdana"/>
               </a:rPr>
@@ -10434,7 +10434,7 @@
             <a:r>
               <a:rPr sz="1300" b="1" i="0" spc="156">
                 <a:solidFill>
-                  <a:srgbClr val="166534"/>
+                  <a:srgbClr val="A5335F"/>
                 </a:solidFill>
                 <a:latin typeface="Verdana"/>
               </a:rPr>
@@ -10675,7 +10675,7 @@
             <a:r>
               <a:rPr sz="1800" b="1" i="0">
                 <a:solidFill>
-                  <a:srgbClr val="166534"/>
+                  <a:srgbClr val="A5335F"/>
                 </a:solidFill>
                 <a:latin typeface="Verdana"/>
               </a:rPr>
@@ -10795,7 +10795,7 @@
             <a:r>
               <a:rPr sz="1800" b="1" i="0">
                 <a:solidFill>
-                  <a:srgbClr val="166534"/>
+                  <a:srgbClr val="A5335F"/>
                 </a:solidFill>
                 <a:latin typeface="Verdana"/>
               </a:rPr>
@@ -10915,7 +10915,7 @@
             <a:r>
               <a:rPr sz="1800" b="1" i="0">
                 <a:solidFill>
-                  <a:srgbClr val="166534"/>
+                  <a:srgbClr val="A5335F"/>
                 </a:solidFill>
                 <a:latin typeface="Verdana"/>
               </a:rPr>
@@ -11092,7 +11092,7 @@
             <a:r>
               <a:rPr sz="1300" b="1" i="0" spc="156">
                 <a:solidFill>
-                  <a:srgbClr val="166534"/>
+                  <a:srgbClr val="A5335F"/>
                 </a:solidFill>
                 <a:latin typeface="Verdana"/>
               </a:rPr>
@@ -11216,7 +11216,7 @@
             <a:r>
               <a:rPr sz="2100" b="1" i="0">
                 <a:solidFill>
-                  <a:srgbClr val="166534"/>
+                  <a:srgbClr val="A5335F"/>
                 </a:solidFill>
                 <a:latin typeface="Verdana"/>
               </a:rPr>
@@ -11340,7 +11340,7 @@
             <a:r>
               <a:rPr sz="2100" b="1" i="0">
                 <a:solidFill>
-                  <a:srgbClr val="166534"/>
+                  <a:srgbClr val="A5335F"/>
                 </a:solidFill>
                 <a:latin typeface="Verdana"/>
               </a:rPr>
@@ -11464,7 +11464,7 @@
             <a:r>
               <a:rPr sz="2100" b="1" i="0">
                 <a:solidFill>
-                  <a:srgbClr val="166534"/>
+                  <a:srgbClr val="A5335F"/>
                 </a:solidFill>
                 <a:latin typeface="Verdana"/>
               </a:rPr>

--- a/assets/powerpoints/module-relations/E2-je-retiens-des-mots.pptx
+++ b/assets/powerpoints/module-relations/E2-je-retiens-des-mots.pptx
@@ -11507,7 +11507,7 @@
                 </a:solidFill>
                 <a:latin typeface="Verdana"/>
               </a:rPr>
-              <a:t>Sept panneaux « En apprendre plus », avec de l'audio. Ils restent accessibles après la fin du module.</a:t>
+              <a:t>Sept panneaux « Ouvrir la mini-leçon », avec de l'audio. Ils restent accessibles après la fin du module.</a:t>
             </a:r>
           </a:p>
         </p:txBody>
